--- a/docs/경쟁기술_인텔리전스_구조_V4.pptx
+++ b/docs/경쟁기술_인텔리전스_구조_V4.pptx
@@ -3166,7 +3166,7 @@
                 </a:solidFill>
                 <a:latin typeface="맑은 고딕"/>
               </a:rPr>
-              <a:t>경쟁기술 인텔리전스 — 무엇을 조사했고, 우리는 어디에 서 있는가</a:t>
+              <a:t>경쟁기술 인텔리전스 V4 — 무엇을 조사했고, 자사는 어디에 서 있는가</a:t>
             </a:r>
           </a:p>
         </p:txBody>
@@ -3205,7 +3205,7 @@
                 </a:solidFill>
                 <a:latin typeface="맑은 고딕"/>
               </a:rPr>
-              <a:t>배터리 공정기술 57개를 경쟁사 6사와 비교했습니다   |   모든 숫자는 2026-09-13 실제 조사값입니다   |   근거마다 특허 원문 링크가 붙어 있습니다</a:t>
+              <a:t>배터리 공정기술 57개를 경쟁사 6사와 비교했습니다   |   AI 판독: CPC 국제분류 규칙   |   모든 숫자는 2026-09-13 실제 조사값입니다</a:t>
             </a:r>
           </a:p>
         </p:txBody>
@@ -3580,7 +3580,7 @@
                 </a:solidFill>
                 <a:latin typeface="맑은 고딕"/>
               </a:rPr>
-              <a:t>4만 1,685 건</a:t>
+              <a:t>4만 2,289 건</a:t>
             </a:r>
           </a:p>
         </p:txBody>
@@ -3619,7 +3619,7 @@
                 </a:solidFill>
                 <a:latin typeface="맑은 고딕"/>
               </a:rPr>
-              <a:t>경쟁사 특허 4만 + 국내 1,665 + 공시 20</a:t>
+              <a:t>특허 4만 1,665 + 공시 590 + 논문 34</a:t>
             </a:r>
           </a:p>
         </p:txBody>
@@ -3787,7 +3787,7 @@
                 </a:solidFill>
                 <a:latin typeface="맑은 고딕"/>
               </a:rPr>
-              <a:t>1만 1,051 건</a:t>
+              <a:t>1만 1,060 건</a:t>
             </a:r>
           </a:p>
         </p:txBody>
@@ -4201,7 +4201,7 @@
                 </a:solidFill>
                 <a:latin typeface="맑은 고딕"/>
               </a:rPr>
-              <a:t>약 75 %</a:t>
+              <a:t>약 80 %</a:t>
             </a:r>
           </a:p>
         </p:txBody>
@@ -4240,7 +4240,7 @@
                 </a:solidFill>
                 <a:latin typeface="맑은 고딕"/>
               </a:rPr>
-              <a:t>AI 판독 적용 완료</a:t>
+              <a:t>창구 6곳 연결 완료</a:t>
             </a:r>
           </a:p>
         </p:txBody>
@@ -4447,7 +4447,7 @@
                 </a:solidFill>
                 <a:latin typeface="맑은 고딕"/>
               </a:rPr>
-              <a:t>특허 1만 5,990 · 공시 3</a:t>
+              <a:t>특허 1만 5,990 · 공시 72</a:t>
             </a:r>
           </a:p>
         </p:txBody>
@@ -4486,7 +4486,7 @@
                 </a:solidFill>
                 <a:latin typeface="맑은 고딕"/>
               </a:rPr>
-              <a:t>1만 5,993</a:t>
+              <a:t>1만 6,062</a:t>
             </a:r>
           </a:p>
         </p:txBody>
@@ -4735,7 +4735,7 @@
                 </a:solidFill>
                 <a:latin typeface="맑은 고딕"/>
               </a:rPr>
-              <a:t>특허 9,826 · 설비투자 공시 17</a:t>
+              <a:t>특허 9,826 · 설비투자 공시 26</a:t>
             </a:r>
           </a:p>
         </p:txBody>
@@ -4774,7 +4774,7 @@
                 </a:solidFill>
                 <a:latin typeface="맑은 고딕"/>
               </a:rPr>
-              <a:t>9,843</a:t>
+              <a:t>9,852</a:t>
             </a:r>
           </a:p>
         </p:txBody>
@@ -4832,7 +4832,7 @@
         <p:spPr>
           <a:xfrm>
             <a:off x="4956048" y="3058668"/>
-            <a:ext cx="408188" cy="77724"/>
+            <a:ext cx="401604" cy="77724"/>
           </a:xfrm>
           <a:prstGeom prst="rect">
             <a:avLst/>
@@ -4901,7 +4901,7 @@
                 </a:solidFill>
                 <a:latin typeface="맑은 고딕"/>
               </a:rPr>
-              <a:t>62%</a:t>
+              <a:t>61%</a:t>
             </a:r>
           </a:p>
         </p:txBody>
@@ -5023,7 +5023,7 @@
                 </a:solidFill>
                 <a:latin typeface="맑은 고딕"/>
               </a:rPr>
-              <a:t>특허 6,717</a:t>
+              <a:t>특허 6,717 · 공시 80</a:t>
             </a:r>
           </a:p>
         </p:txBody>
@@ -5062,7 +5062,7 @@
                 </a:solidFill>
                 <a:latin typeface="맑은 고딕"/>
               </a:rPr>
-              <a:t>6,717</a:t>
+              <a:t>6,797</a:t>
             </a:r>
           </a:p>
         </p:txBody>
@@ -5209,7 +5209,7 @@
             <a:avLst/>
           </a:prstGeom>
           <a:solidFill>
-            <a:srgbClr val="2C6B52"/>
+            <a:srgbClr val="B9821A"/>
           </a:solidFill>
           <a:ln>
             <a:noFill/>
@@ -5311,7 +5311,7 @@
                 </a:solidFill>
                 <a:latin typeface="맑은 고딕"/>
               </a:rPr>
-              <a:t>특허 2,991</a:t>
+              <a:t>특허 2,991 · 공시 없음(일본 EDINET 미연결)</a:t>
             </a:r>
           </a:p>
         </p:txBody>
@@ -5350,7 +5350,7 @@
                 </a:solidFill>
                 <a:latin typeface="맑은 고딕"/>
               </a:rPr>
-              <a:t>2,991</a:t>
+              <a:t>2,992</a:t>
             </a:r>
           </a:p>
         </p:txBody>
@@ -5414,7 +5414,7 @@
             <a:avLst/>
           </a:prstGeom>
           <a:solidFill>
-            <a:srgbClr val="2C6B52"/>
+            <a:srgbClr val="B9821A"/>
           </a:solidFill>
           <a:ln>
             <a:noFill/>
@@ -5599,7 +5599,7 @@
                 </a:solidFill>
                 <a:latin typeface="맑은 고딕"/>
               </a:rPr>
-              <a:t>특허 2,261</a:t>
+              <a:t>특허 2,261 · 공시 62</a:t>
             </a:r>
           </a:p>
         </p:txBody>
@@ -5638,7 +5638,7 @@
                 </a:solidFill>
                 <a:latin typeface="맑은 고딕"/>
               </a:rPr>
-              <a:t>2,261</a:t>
+              <a:t>2,323</a:t>
             </a:r>
           </a:p>
         </p:txBody>
@@ -5785,7 +5785,7 @@
             <a:avLst/>
           </a:prstGeom>
           <a:solidFill>
-            <a:srgbClr val="2C6B52"/>
+            <a:srgbClr val="B9821A"/>
           </a:solidFill>
           <a:ln>
             <a:noFill/>
@@ -5887,7 +5887,7 @@
                 </a:solidFill>
                 <a:latin typeface="맑은 고딕"/>
               </a:rPr>
-              <a:t>특허 2,215</a:t>
+              <a:t>특허 2,215 · 설비투자는 원천에 없음</a:t>
             </a:r>
           </a:p>
         </p:txBody>
@@ -5926,7 +5926,7 @@
                 </a:solidFill>
                 <a:latin typeface="맑은 고딕"/>
               </a:rPr>
-              <a:t>2,215</a:t>
+              <a:t>2,222</a:t>
             </a:r>
           </a:p>
         </p:txBody>
@@ -5990,7 +5990,7 @@
             <a:avLst/>
           </a:prstGeom>
           <a:solidFill>
-            <a:srgbClr val="2C6B52"/>
+            <a:srgbClr val="B9821A"/>
           </a:solidFill>
           <a:ln>
             <a:noFill/>
@@ -6175,7 +6175,7 @@
                 </a:solidFill>
                 <a:latin typeface="맑은 고딕"/>
               </a:rPr>
-              <a:t>특허 169 — 미국 공시 미연결</a:t>
+              <a:t>특허 169 · SEC 본문검색 연결</a:t>
             </a:r>
           </a:p>
         </p:txBody>
@@ -6463,7 +6463,7 @@
                 </a:solidFill>
                 <a:latin typeface="맑은 고딕"/>
               </a:rPr>
-              <a:t>6개사 + 자사</a:t>
+              <a:t>경쟁사 6사 + 자사</a:t>
             </a:r>
           </a:p>
         </p:txBody>
@@ -6502,7 +6502,7 @@
                 </a:solidFill>
                 <a:latin typeface="맑은 고딕"/>
               </a:rPr>
-              <a:t>4만 1,685</a:t>
+              <a:t>4만 2,289</a:t>
             </a:r>
           </a:p>
         </p:txBody>
@@ -6753,7 +6753,7 @@
                 </a:solidFill>
                 <a:latin typeface="맑은 고딕"/>
               </a:rPr>
-              <a:t>· 열위 10건 · 경합 4건 · 동등 2건 — 어디에 서 있는지 한눈에</a:t>
+              <a:t>· 열위 16건 · 동등 14건 · 우위 20건 — 어디에 서 있는지 한눈에</a:t>
             </a:r>
           </a:p>
         </p:txBody>
@@ -6792,7 +6792,7 @@
                 </a:solidFill>
                 <a:latin typeface="맑은 고딕"/>
               </a:rPr>
-              <a:t>· 숫자를 누르면 근거 특허 목록과 원문 링크가 바로 뜬다</a:t>
+              <a:t>· 시급도 = 얼마나 뒤졌나 × 몇 개사가 가졌나 × 근거가 단단한가</a:t>
             </a:r>
           </a:p>
         </p:txBody>
@@ -6831,7 +6831,7 @@
                 </a:solidFill>
                 <a:latin typeface="맑은 고딕"/>
               </a:rPr>
-              <a:t>· TRL·격차·시급도의 산정 근거를 화면에서 확인할 수 있다</a:t>
+              <a:t>· 기술 격차를 '몇 년'이 아니라 '무엇을 해야 해서 몇 년'으로 보여준다</a:t>
             </a:r>
           </a:p>
         </p:txBody>
@@ -6870,7 +6870,7 @@
                 </a:solidFill>
                 <a:latin typeface="맑은 고딕"/>
               </a:rPr>
-              <a:t>· 특허청이 매긴 CPC 국제분류로 판독한다 — 단어 짐작이 아니다</a:t>
+              <a:t>· 숫자를 누르면 근거 목록과 원문 링크가 바로 뜬다</a:t>
             </a:r>
           </a:p>
         </p:txBody>
@@ -7033,7 +7033,7 @@
                 </a:solidFill>
                 <a:latin typeface="맑은 고딕"/>
               </a:rPr>
-              <a:t>· 경쟁사는 특허만 보인다. 라인 가동 여부를 몰라 실제로는 더 앞설 수 있다</a:t>
+              <a:t>· 같은 발명이 나라별로 여러 건처럼 세어진다 — 특허가족 병합이 없다</a:t>
             </a:r>
           </a:p>
         </p:txBody>
@@ -7072,7 +7072,7 @@
                 </a:solidFill>
                 <a:latin typeface="맑은 고딕"/>
               </a:rPr>
-              <a:t>· 같은 발명이 나라별로 여러 건처럼 세어진다 — 특허가족 병합이 없다</a:t>
+              <a:t>· BYD·파나소닉은 설비투자가 0건이다. 원천에 없거나 키가 필요하다</a:t>
             </a:r>
           </a:p>
         </p:txBody>
@@ -7111,7 +7111,7 @@
                 </a:solidFill>
                 <a:latin typeface="맑은 고딕"/>
               </a:rPr>
-              <a:t>· 테슬라는 169건뿐이다. 미국 공시(SEC)가 국내망에서 차단돼 있다</a:t>
+              <a:t>· 경쟁사는 대부분 특허만 보인다. 라인 가동 여부는 알 수 없다</a:t>
             </a:r>
           </a:p>
         </p:txBody>
@@ -7279,7 +7279,7 @@
                 </a:solidFill>
                 <a:latin typeface="맑은 고딕"/>
               </a:rPr>
-              <a:t>특허 4만 건 확보 · AI 판독 적용</a:t>
+              <a:t>창구 6곳 연결 · 판정 기준 개편</a:t>
             </a:r>
           </a:p>
         </p:txBody>
@@ -7318,8 +7318,8 @@
                 </a:solidFill>
                 <a:latin typeface="맑은 고딕"/>
               </a:rPr>
-              <a:t>CPC 국제분류로 판독해
-배정량이 228건 → 1만 1,051건.</a:t>
+              <a:t>SEC·HKEX·논문을 새로 뚫었고
+시급도를 곱셈식으로 바꿨다.</a:t>
             </a:r>
           </a:p>
         </p:txBody>
@@ -7358,7 +7358,7 @@
                 </a:solidFill>
                 <a:latin typeface="맑은 고딕"/>
               </a:rPr>
-              <a:t>비용 2,000원</a:t>
+              <a:t>추가 비용 없음</a:t>
             </a:r>
           </a:p>
         </p:txBody>
@@ -7424,7 +7424,7 @@
             <a:avLst/>
           </a:prstGeom>
           <a:solidFill>
-            <a:srgbClr val="2C6B52"/>
+            <a:srgbClr val="B9821A"/>
           </a:solidFill>
           <a:ln>
             <a:noFill/>
@@ -7487,7 +7487,7 @@
                 </a:solidFill>
                 <a:latin typeface="맑은 고딕"/>
               </a:rPr>
-              <a:t>완료</a:t>
+              <a:t>다음 1단계</a:t>
             </a:r>
           </a:p>
         </p:txBody>
@@ -7526,7 +7526,7 @@
                 </a:solidFill>
                 <a:latin typeface="맑은 고딕"/>
               </a:rPr>
-              <a:t>판정 근거 공개 · 원문 링크</a:t>
+              <a:t>자사 보유 현황 확정</a:t>
             </a:r>
           </a:p>
         </p:txBody>
@@ -7565,8 +7565,8 @@
                 </a:solidFill>
                 <a:latin typeface="맑은 고딕"/>
               </a:rPr>
-              <a:t>모든 숫자에 산정 근거와
-특허 원문 링크를 붙였다.</a:t>
+              <a:t>'미보유' 18건이 실제로 미보유인지
+공정기술팀 확인이 필요하다.</a:t>
             </a:r>
           </a:p>
         </p:txBody>
@@ -7601,11 +7601,11 @@
             <a:r>
               <a:rPr sz="900" b="1">
                 <a:solidFill>
-                  <a:srgbClr val="2C6B52"/>
+                  <a:srgbClr val="B9821A"/>
                 </a:solidFill>
                 <a:latin typeface="맑은 고딕"/>
               </a:rPr>
-              <a:t>추가 비용 없음</a:t>
+              <a:t>약 3일</a:t>
             </a:r>
           </a:p>
         </p:txBody>
@@ -7734,7 +7734,7 @@
                 </a:solidFill>
                 <a:latin typeface="맑은 고딕"/>
               </a:rPr>
-              <a:t>다음 1단계</a:t>
+              <a:t>다음 2단계</a:t>
             </a:r>
           </a:p>
         </p:txBody>
@@ -7773,7 +7773,7 @@
                 </a:solidFill>
                 <a:latin typeface="맑은 고딕"/>
               </a:rPr>
-              <a:t>자사 보유 현황 확정</a:t>
+              <a:t>특허가족·회사명 병합</a:t>
             </a:r>
           </a:p>
         </p:txBody>
@@ -7812,8 +7812,8 @@
                 </a:solidFill>
                 <a:latin typeface="맑은 고딕"/>
               </a:rPr>
-              <a:t>'미보유' 18건이 실제로 미보유인지
-공정기술팀 확인이 필요하다.</a:t>
+              <a:t>같은 발명이 여러 건으로 세어지는 것을
+막아야 숫자를 믿을 수 있다.</a:t>
             </a:r>
           </a:p>
         </p:txBody>
@@ -7852,7 +7852,7 @@
                 </a:solidFill>
                 <a:latin typeface="맑은 고딕"/>
               </a:rPr>
-              <a:t>약 3일</a:t>
+              <a:t>약 2일</a:t>
             </a:r>
           </a:p>
         </p:txBody>
@@ -7981,7 +7981,7 @@
                 </a:solidFill>
                 <a:latin typeface="맑은 고딕"/>
               </a:rPr>
-              <a:t>다음 2단계</a:t>
+              <a:t>다음 3단계</a:t>
             </a:r>
           </a:p>
         </p:txBody>
@@ -8020,7 +8020,7 @@
                 </a:solidFill>
                 <a:latin typeface="맑은 고딕"/>
               </a:rPr>
-              <a:t>특허가족 병합 · 창구 확대</a:t>
+              <a:t>EDINET·EPO 연결</a:t>
             </a:r>
           </a:p>
         </p:txBody>
@@ -8059,8 +8059,8 @@
                 </a:solidFill>
                 <a:latin typeface="맑은 고딕"/>
               </a:rPr>
-              <a:t>중복을 없애고 SEC·HKEX·EPO를
-연결하면 90%에 이른다.</a:t>
+              <a:t>파나소닉 설비투자와 청구항 원문.
+키 발급만 받으면 된다.</a:t>
             </a:r>
           </a:p>
         </p:txBody>
@@ -8099,7 +8099,7 @@
                 </a:solidFill>
                 <a:latin typeface="맑은 고딕"/>
               </a:rPr>
-              <a:t>약 7일</a:t>
+              <a:t>약 2일</a:t>
             </a:r>
           </a:p>
         </p:txBody>

--- a/docs/경쟁기술_인텔리전스_구조_V4.pptx
+++ b/docs/경쟁기술_인텔리전스_구조_V4.pptx
@@ -3166,7 +3166,7 @@
                 </a:solidFill>
                 <a:latin typeface="맑은 고딕"/>
               </a:rPr>
-              <a:t>경쟁기술 인텔리전스 V4 — 무엇을 조사했고, 자사는 어디에 서 있는가</a:t>
+              <a:t>경쟁기술 인텔리전스 V4 — 자사 기술 수준 진단 및 보완 우선순위</a:t>
             </a:r>
           </a:p>
         </p:txBody>
@@ -3205,7 +3205,7 @@
                 </a:solidFill>
                 <a:latin typeface="맑은 고딕"/>
               </a:rPr>
-              <a:t>배터리 공정기술 57개를 경쟁사 6사와 비교했습니다   |   AI 판독: CPC 국제분류 규칙   |   모든 숫자는 2026-09-13 실제 조사값입니다</a:t>
+              <a:t>특허를 핵심 기준으로 판정, 설비투자 공시·기술발표를 보조 근거로 교차 검증함   |   AI 판독: CPC 국제분류 규칙   |   2026-09-13 실측 기준</a:t>
             </a:r>
           </a:p>
         </p:txBody>
@@ -3334,7 +3334,7 @@
                 </a:solidFill>
                 <a:latin typeface="맑은 고딕"/>
               </a:rPr>
-              <a:t>① 조사한 범위</a:t>
+              <a:t>① 조사 범위</a:t>
             </a:r>
           </a:p>
         </p:txBody>
@@ -3541,7 +3541,7 @@
                 </a:solidFill>
                 <a:latin typeface="맑은 고딕"/>
               </a:rPr>
-              <a:t>② 실제로 가져온 것</a:t>
+              <a:t>② 수집 완료</a:t>
             </a:r>
           </a:p>
         </p:txBody>
@@ -3619,7 +3619,7 @@
                 </a:solidFill>
                 <a:latin typeface="맑은 고딕"/>
               </a:rPr>
-              <a:t>특허 4만 1,665 + 공시 590 + 논문 34</a:t>
+              <a:t>특허 4만 1,665 · 공시 590 · 논문 34</a:t>
             </a:r>
           </a:p>
         </p:txBody>
@@ -3748,7 +3748,7 @@
                 </a:solidFill>
                 <a:latin typeface="맑은 고딕"/>
               </a:rPr>
-              <a:t>③ 기술에 배정한 것</a:t>
+              <a:t>③ 기술 배정</a:t>
             </a:r>
           </a:p>
         </p:txBody>
@@ -3826,7 +3826,7 @@
                 </a:solidFill>
                 <a:latin typeface="맑은 고딕"/>
               </a:rPr>
-              <a:t>CPC 국제분류로 판독</a:t>
+              <a:t>CPC 국제분류 판독 적용</a:t>
             </a:r>
           </a:p>
         </p:txBody>
@@ -3955,7 +3955,7 @@
                 </a:solidFill>
                 <a:latin typeface="맑은 고딕"/>
               </a:rPr>
-              <a:t>④ 판정한 기술</a:t>
+              <a:t>④ 판정 기술</a:t>
             </a:r>
           </a:p>
         </p:txBody>
@@ -4033,7 +4033,7 @@
                 </a:solidFill>
                 <a:latin typeface="맑은 고딕"/>
               </a:rPr>
-              <a:t>근거를 확보한 기술 수</a:t>
+              <a:t>근거 확보 기술 수</a:t>
             </a:r>
           </a:p>
         </p:txBody>
@@ -4325,7 +4325,7 @@
                 </a:solidFill>
                 <a:latin typeface="맑은 고딕"/>
               </a:rPr>
-              <a:t>경쟁사별로 얼마나 조사했는가</a:t>
+              <a:t>경쟁사별 조사 규모</a:t>
             </a:r>
           </a:p>
         </p:txBody>
@@ -4447,7 +4447,7 @@
                 </a:solidFill>
                 <a:latin typeface="맑은 고딕"/>
               </a:rPr>
-              <a:t>특허 1만 5,990 · 공시 72</a:t>
+              <a:t>특허 1만 5,990 · 공시 79</a:t>
             </a:r>
           </a:p>
         </p:txBody>
@@ -4486,7 +4486,7 @@
                 </a:solidFill>
                 <a:latin typeface="맑은 고딕"/>
               </a:rPr>
-              <a:t>1만 6,062</a:t>
+              <a:t>1만 6,069</a:t>
             </a:r>
           </a:p>
         </p:txBody>
@@ -4735,7 +4735,7 @@
                 </a:solidFill>
                 <a:latin typeface="맑은 고딕"/>
               </a:rPr>
-              <a:t>특허 9,826 · 설비투자 공시 26</a:t>
+              <a:t>특허 9,826 · 설비투자 공시 27</a:t>
             </a:r>
           </a:p>
         </p:txBody>
@@ -4774,7 +4774,7 @@
                 </a:solidFill>
                 <a:latin typeface="맑은 고딕"/>
               </a:rPr>
-              <a:t>9,852</a:t>
+              <a:t>9,853</a:t>
             </a:r>
           </a:p>
         </p:txBody>
@@ -5023,7 +5023,7 @@
                 </a:solidFill>
                 <a:latin typeface="맑은 고딕"/>
               </a:rPr>
-              <a:t>특허 6,717 · 공시 80</a:t>
+              <a:t>특허 6,717 · 공시 82</a:t>
             </a:r>
           </a:p>
         </p:txBody>
@@ -5062,7 +5062,7 @@
                 </a:solidFill>
                 <a:latin typeface="맑은 고딕"/>
               </a:rPr>
-              <a:t>6,797</a:t>
+              <a:t>6,799</a:t>
             </a:r>
           </a:p>
         </p:txBody>
@@ -5311,7 +5311,7 @@
                 </a:solidFill>
                 <a:latin typeface="맑은 고딕"/>
               </a:rPr>
-              <a:t>특허 2,991 · 공시 없음(일본 EDINET 미연결)</a:t>
+              <a:t>특허 2,991 · 공시 1 — EDINET 미연결</a:t>
             </a:r>
           </a:p>
         </p:txBody>
@@ -5887,7 +5887,7 @@
                 </a:solidFill>
                 <a:latin typeface="맑은 고딕"/>
               </a:rPr>
-              <a:t>특허 2,215 · 설비투자는 원천에 없음</a:t>
+              <a:t>특허 2,215 · 설비투자 원천 부재 확인</a:t>
             </a:r>
           </a:p>
         </p:txBody>
@@ -6714,7 +6714,7 @@
                 </a:solidFill>
                 <a:latin typeface="맑은 고딕"/>
               </a:rPr>
-              <a:t>이 화면이 답하는 것</a:t>
+              <a:t>의사결정 지원 항목</a:t>
             </a:r>
           </a:p>
         </p:txBody>
@@ -6753,7 +6753,7 @@
                 </a:solidFill>
                 <a:latin typeface="맑은 고딕"/>
               </a:rPr>
-              <a:t>· 열위 16건 · 동등 14건 · 우위 20건 — 어디에 서 있는지 한눈에</a:t>
+              <a:t>· 공정기술 57개 전량을 열위 16 · 동등 14 · 우위 20 으로 구분 제시함</a:t>
             </a:r>
           </a:p>
         </p:txBody>
@@ -6792,7 +6792,7 @@
                 </a:solidFill>
                 <a:latin typeface="맑은 고딕"/>
               </a:rPr>
-              <a:t>· 시급도 = 얼마나 뒤졌나 × 몇 개사가 가졌나 × 근거가 단단한가</a:t>
+              <a:t>· 시급도 = 기술 격차 × 경쟁사 확산도 × 근거 확실성 — 보완 우선순위 도출</a:t>
             </a:r>
           </a:p>
         </p:txBody>
@@ -6831,7 +6831,7 @@
                 </a:solidFill>
                 <a:latin typeface="맑은 고딕"/>
               </a:rPr>
-              <a:t>· 기술 격차를 '몇 년'이 아니라 '무엇을 해야 해서 몇 년'으로 보여준다</a:t>
+              <a:t>· 기술 격차를 단계별 수행 과업 및 소요기간으로 분해 제시함</a:t>
             </a:r>
           </a:p>
         </p:txBody>
@@ -6870,7 +6870,7 @@
                 </a:solidFill>
                 <a:latin typeface="맑은 고딕"/>
               </a:rPr>
-              <a:t>· 숫자를 누르면 근거 목록과 원문 링크가 바로 뜬다</a:t>
+              <a:t>· 전 수치에 근거 목록 및 원문 링크 연결 — 원천까지 역추적 가능함</a:t>
             </a:r>
           </a:p>
         </p:txBody>
@@ -6955,7 +6955,7 @@
                 </a:solidFill>
                 <a:latin typeface="맑은 고딕"/>
               </a:rPr>
-              <a:t>아직 남은 것</a:t>
+              <a:t>한계 및 후속 과제</a:t>
             </a:r>
           </a:p>
         </p:txBody>
@@ -6994,7 +6994,7 @@
                 </a:solidFill>
                 <a:latin typeface="맑은 고딕"/>
               </a:rPr>
-              <a:t>· 기존 '미보유' 18건 모두에서 자사 특허가 검색됐다 — 확인이 필요하다</a:t>
+              <a:t>· 기존 '미보유' 18건 전량에서 자사 특허 검색됨 — 공정기술팀 재검증 필요함</a:t>
             </a:r>
           </a:p>
         </p:txBody>
@@ -7033,7 +7033,7 @@
                 </a:solidFill>
                 <a:latin typeface="맑은 고딕"/>
               </a:rPr>
-              <a:t>· 같은 발명이 나라별로 여러 건처럼 세어진다 — 특허가족 병합이 없다</a:t>
+              <a:t>· 특허가족 병합 미적용 — 동일 발명의 국가별 중복 계상 발생함</a:t>
             </a:r>
           </a:p>
         </p:txBody>
@@ -7072,7 +7072,7 @@
                 </a:solidFill>
                 <a:latin typeface="맑은 고딕"/>
               </a:rPr>
-              <a:t>· BYD·파나소닉은 설비투자가 0건이다. 원천에 없거나 키가 필요하다</a:t>
+              <a:t>· BYD 설비투자 원천 부재 확인 · 파나소닉은 EDINET 키 발급 필요함</a:t>
             </a:r>
           </a:p>
         </p:txBody>
@@ -7111,7 +7111,7 @@
                 </a:solidFill>
                 <a:latin typeface="맑은 고딕"/>
               </a:rPr>
-              <a:t>· 경쟁사는 대부분 특허만 보인다. 라인 가동 여부는 알 수 없다</a:t>
+              <a:t>· 경쟁사 근거는 특허 중심 — 라인 가동 여부 미확인 상태임</a:t>
             </a:r>
           </a:p>
         </p:txBody>
@@ -7279,7 +7279,7 @@
                 </a:solidFill>
                 <a:latin typeface="맑은 고딕"/>
               </a:rPr>
-              <a:t>창구 6곳 연결 · 판정 기준 개편</a:t>
+              <a:t>창구 6곳 연결 · 판정 기준 재정립</a:t>
             </a:r>
           </a:p>
         </p:txBody>
@@ -7318,8 +7318,8 @@
                 </a:solidFill>
                 <a:latin typeface="맑은 고딕"/>
               </a:rPr>
-              <a:t>SEC·HKEX·논문을 새로 뚫었고
-시급도를 곱셈식으로 바꿨다.</a:t>
+              <a:t>SEC·HKEX·학회 신규 연결 완료.
+시급도 곱셈 방식 전환 적용.</a:t>
             </a:r>
           </a:p>
         </p:txBody>
@@ -7487,7 +7487,7 @@
                 </a:solidFill>
                 <a:latin typeface="맑은 고딕"/>
               </a:rPr>
-              <a:t>다음 1단계</a:t>
+              <a:t>1단계</a:t>
             </a:r>
           </a:p>
         </p:txBody>
@@ -7565,8 +7565,8 @@
                 </a:solidFill>
                 <a:latin typeface="맑은 고딕"/>
               </a:rPr>
-              <a:t>'미보유' 18건이 실제로 미보유인지
-공정기술팀 확인이 필요하다.</a:t>
+              <a:t>'미보유' 18건 재검증 추진.
+공정기술팀 확인 필요함.</a:t>
             </a:r>
           </a:p>
         </p:txBody>
@@ -7734,7 +7734,7 @@
                 </a:solidFill>
                 <a:latin typeface="맑은 고딕"/>
               </a:rPr>
-              <a:t>다음 2단계</a:t>
+              <a:t>2단계</a:t>
             </a:r>
           </a:p>
         </p:txBody>
@@ -7773,7 +7773,7 @@
                 </a:solidFill>
                 <a:latin typeface="맑은 고딕"/>
               </a:rPr>
-              <a:t>특허가족·회사명 병합</a:t>
+              <a:t>특허가족·법인명 병합</a:t>
             </a:r>
           </a:p>
         </p:txBody>
@@ -7812,8 +7812,8 @@
                 </a:solidFill>
                 <a:latin typeface="맑은 고딕"/>
               </a:rPr>
-              <a:t>같은 발명이 여러 건으로 세어지는 것을
-막아야 숫자를 믿을 수 있다.</a:t>
+              <a:t>중복 계상 제거를 통한
+집계 신뢰도 확보.</a:t>
             </a:r>
           </a:p>
         </p:txBody>
@@ -7981,7 +7981,7 @@
                 </a:solidFill>
                 <a:latin typeface="맑은 고딕"/>
               </a:rPr>
-              <a:t>다음 3단계</a:t>
+              <a:t>3단계</a:t>
             </a:r>
           </a:p>
         </p:txBody>
@@ -8059,8 +8059,8 @@
                 </a:solidFill>
                 <a:latin typeface="맑은 고딕"/>
               </a:rPr>
-              <a:t>파나소닉 설비투자와 청구항 원문.
-키 발급만 받으면 된다.</a:t>
+              <a:t>파나소닉 설비투자 및 청구항 원문.
+키 발급 후 즉시 적용 가능함.</a:t>
             </a:r>
           </a:p>
         </p:txBody>
@@ -8138,7 +8138,7 @@
                 </a:solidFill>
                 <a:latin typeface="맑은 고딕"/>
               </a:rPr>
-              <a:t>모든 수치는 2026-09-13 실제 조사값입니다. 추정치는 '약'으로 표기했습니다.   |   LG에너지솔루션 기술전략 · 내부 검토용</a:t>
+              <a:t>전 수치는 2026-09-13 실측값이며, 추정치는 '약'으로 표기함.   |   LG에너지솔루션 기술전략 · 내부 검토용</a:t>
             </a:r>
           </a:p>
         </p:txBody>
